--- a/slides/Chapter 14 - Financing State Government (Lecture Deck).pptx
+++ b/slides/Chapter 14 - Financing State Government (Lecture Deck).pptx
@@ -3661,92 +3661,6 @@
           </a:p>
         </p:txBody>
       </p:sp>
-      <p:sp>
-        <p:nvSpPr>
-          <p:cNvPr id="16" name="Shape 13"/>
-          <p:cNvSpPr/>
-          <p:nvPr/>
-        </p:nvSpPr>
-        <p:spPr>
-          <a:xfrm>
-            <a:off x="594360" y="6035040"/>
-            <a:ext cx="11002975" cy="411480"/>
-          </a:xfrm>
-          <a:prstGeom prst="roundRect">
-            <a:avLst>
-              <a:gd name="adj" fmla="val 15556"/>
-            </a:avLst>
-          </a:prstGeom>
-          <a:solidFill>
-            <a:srgbClr val="FFFFFF"/>
-          </a:solidFill>
-          <a:ln w="19050">
-            <a:solidFill>
-              <a:srgbClr val="B07D2B"/>
-            </a:solidFill>
-            <a:prstDash val="solid"/>
-          </a:ln>
-        </p:spPr>
-      </p:sp>
-      <p:sp>
-        <p:nvSpPr>
-          <p:cNvPr id="17" name="Text 14"/>
-          <p:cNvSpPr txBox="1"/>
-          <p:nvPr/>
-        </p:nvSpPr>
-        <p:spPr>
-          <a:xfrm>
-            <a:off x="868680" y="6199632"/>
-            <a:ext cx="10454335" cy="329184"/>
-          </a:xfrm>
-          <a:prstGeom prst="rect">
-            <a:avLst/>
-          </a:prstGeom>
-          <a:noFill/>
-          <a:ln/>
-        </p:spPr>
-        <p:txBody>
-          <a:bodyPr wrap="square" lIns="0" tIns="0" rIns="0" bIns="0" rtlCol="0" anchor="ctr"/>
-          <a:lstStyle/>
-          <a:p>
-            <a:pPr indent="0" marL="0">
-              <a:buNone/>
-            </a:pPr>
-            <a:endParaRPr lang="en-US" sz="1400" dirty="0"/>
-          </a:p>
-        </p:txBody>
-      </p:sp>
-      <p:sp>
-        <p:nvSpPr>
-          <p:cNvPr id="18" name="Text 15"/>
-          <p:cNvSpPr txBox="1"/>
-          <p:nvPr/>
-        </p:nvSpPr>
-        <p:spPr>
-          <a:xfrm>
-            <a:off x="868680" y="6565392"/>
-            <a:ext cx="10454335" cy="-301752"/>
-          </a:xfrm>
-          <a:prstGeom prst="rect">
-            <a:avLst/>
-          </a:prstGeom>
-          <a:noFill/>
-          <a:ln/>
-        </p:spPr>
-        <p:txBody>
-          <a:bodyPr wrap="square" lIns="0" tIns="0" rIns="0" bIns="0" rtlCol="0" anchor="ctr"/>
-          <a:lstStyle/>
-          <a:p>
-            <a:pPr indent="0" marL="0">
-              <a:lnSpc>
-                <a:spcPts val="1700"/>
-              </a:lnSpc>
-              <a:buNone/>
-            </a:pPr>
-            <a:endParaRPr lang="en-US" sz="1250" dirty="0"/>
-          </a:p>
-        </p:txBody>
-      </p:sp>
     </p:spTree>
   </p:cSld>
   <p:clrMapOvr>
@@ -7940,92 +7854,6 @@
           </a:p>
         </p:txBody>
       </p:sp>
-      <p:sp>
-        <p:nvSpPr>
-          <p:cNvPr id="18" name="Shape 15"/>
-          <p:cNvSpPr/>
-          <p:nvPr/>
-        </p:nvSpPr>
-        <p:spPr>
-          <a:xfrm>
-            <a:off x="594360" y="6217920"/>
-            <a:ext cx="11002975" cy="228600"/>
-          </a:xfrm>
-          <a:prstGeom prst="roundRect">
-            <a:avLst>
-              <a:gd name="adj" fmla="val 28000"/>
-            </a:avLst>
-          </a:prstGeom>
-          <a:solidFill>
-            <a:srgbClr val="FFFFFF"/>
-          </a:solidFill>
-          <a:ln w="19050">
-            <a:solidFill>
-              <a:srgbClr val="B07D2B"/>
-            </a:solidFill>
-            <a:prstDash val="solid"/>
-          </a:ln>
-        </p:spPr>
-      </p:sp>
-      <p:sp>
-        <p:nvSpPr>
-          <p:cNvPr id="19" name="Text 16"/>
-          <p:cNvSpPr txBox="1"/>
-          <p:nvPr/>
-        </p:nvSpPr>
-        <p:spPr>
-          <a:xfrm>
-            <a:off x="868680" y="6382512"/>
-            <a:ext cx="10454335" cy="329184"/>
-          </a:xfrm>
-          <a:prstGeom prst="rect">
-            <a:avLst/>
-          </a:prstGeom>
-          <a:noFill/>
-          <a:ln/>
-        </p:spPr>
-        <p:txBody>
-          <a:bodyPr wrap="square" lIns="0" tIns="0" rIns="0" bIns="0" rtlCol="0" anchor="ctr"/>
-          <a:lstStyle/>
-          <a:p>
-            <a:pPr indent="0" marL="0">
-              <a:buNone/>
-            </a:pPr>
-            <a:endParaRPr lang="en-US" sz="1400" dirty="0"/>
-          </a:p>
-        </p:txBody>
-      </p:sp>
-      <p:sp>
-        <p:nvSpPr>
-          <p:cNvPr id="20" name="Text 17"/>
-          <p:cNvSpPr txBox="1"/>
-          <p:nvPr/>
-        </p:nvSpPr>
-        <p:spPr>
-          <a:xfrm>
-            <a:off x="868680" y="6748272"/>
-            <a:ext cx="10454335" cy="-484632"/>
-          </a:xfrm>
-          <a:prstGeom prst="rect">
-            <a:avLst/>
-          </a:prstGeom>
-          <a:noFill/>
-          <a:ln/>
-        </p:spPr>
-        <p:txBody>
-          <a:bodyPr wrap="square" lIns="0" tIns="0" rIns="0" bIns="0" rtlCol="0" anchor="ctr"/>
-          <a:lstStyle/>
-          <a:p>
-            <a:pPr indent="0" marL="0">
-              <a:lnSpc>
-                <a:spcPts val="1700"/>
-              </a:lnSpc>
-              <a:buNone/>
-            </a:pPr>
-            <a:endParaRPr lang="en-US" sz="1250" dirty="0"/>
-          </a:p>
-        </p:txBody>
-      </p:sp>
     </p:spTree>
   </p:cSld>
   <p:clrMapOvr>
@@ -8831,92 +8659,6 @@
               <a:t>The comparatively small cost of running the state's administrative machinery.</a:t>
             </a:r>
             <a:endParaRPr lang="en-US" sz="1150" dirty="0"/>
-          </a:p>
-        </p:txBody>
-      </p:sp>
-      <p:sp>
-        <p:nvSpPr>
-          <p:cNvPr id="26" name="Shape 23"/>
-          <p:cNvSpPr/>
-          <p:nvPr/>
-        </p:nvSpPr>
-        <p:spPr>
-          <a:xfrm>
-            <a:off x="594360" y="5943600"/>
-            <a:ext cx="11002975" cy="502920"/>
-          </a:xfrm>
-          <a:prstGeom prst="roundRect">
-            <a:avLst>
-              <a:gd name="adj" fmla="val 12727"/>
-            </a:avLst>
-          </a:prstGeom>
-          <a:solidFill>
-            <a:srgbClr val="FFFFFF"/>
-          </a:solidFill>
-          <a:ln w="19050">
-            <a:solidFill>
-              <a:srgbClr val="B07D2B"/>
-            </a:solidFill>
-            <a:prstDash val="solid"/>
-          </a:ln>
-        </p:spPr>
-      </p:sp>
-      <p:sp>
-        <p:nvSpPr>
-          <p:cNvPr id="27" name="Text 24"/>
-          <p:cNvSpPr txBox="1"/>
-          <p:nvPr/>
-        </p:nvSpPr>
-        <p:spPr>
-          <a:xfrm>
-            <a:off x="868680" y="6108192"/>
-            <a:ext cx="10454335" cy="329184"/>
-          </a:xfrm>
-          <a:prstGeom prst="rect">
-            <a:avLst/>
-          </a:prstGeom>
-          <a:noFill/>
-          <a:ln/>
-        </p:spPr>
-        <p:txBody>
-          <a:bodyPr wrap="square" lIns="0" tIns="0" rIns="0" bIns="0" rtlCol="0" anchor="ctr"/>
-          <a:lstStyle/>
-          <a:p>
-            <a:pPr indent="0" marL="0">
-              <a:buNone/>
-            </a:pPr>
-            <a:endParaRPr lang="en-US" sz="1400" dirty="0"/>
-          </a:p>
-        </p:txBody>
-      </p:sp>
-      <p:sp>
-        <p:nvSpPr>
-          <p:cNvPr id="28" name="Text 25"/>
-          <p:cNvSpPr txBox="1"/>
-          <p:nvPr/>
-        </p:nvSpPr>
-        <p:spPr>
-          <a:xfrm>
-            <a:off x="868680" y="6473952"/>
-            <a:ext cx="10454335" cy="-210312"/>
-          </a:xfrm>
-          <a:prstGeom prst="rect">
-            <a:avLst/>
-          </a:prstGeom>
-          <a:noFill/>
-          <a:ln/>
-        </p:spPr>
-        <p:txBody>
-          <a:bodyPr wrap="square" lIns="0" tIns="0" rIns="0" bIns="0" rtlCol="0" anchor="ctr"/>
-          <a:lstStyle/>
-          <a:p>
-            <a:pPr indent="0" marL="0">
-              <a:lnSpc>
-                <a:spcPts val="1700"/>
-              </a:lnSpc>
-              <a:buNone/>
-            </a:pPr>
-            <a:endParaRPr lang="en-US" sz="1250" dirty="0"/>
           </a:p>
         </p:txBody>
       </p:sp>

--- a/slides/Chapter 14 - Financing State Government (Lecture Deck).pptx
+++ b/slides/Chapter 14 - Financing State Government (Lecture Deck).pptx
@@ -819,8 +819,9 @@
 on the household. That is a real analytical finding, not a partisan claim.
 Q3 IS THE BEST EXERCISE if you want students doing the work rather than
 debating. Every option has an organized opponent: raising sales tax hits lower
-earners, raising the franchise tax draws business opposition, an income tax now
-requires a statewide vote, and cutting exemptions creates identifiable losers.
+earners, raising the franchise tax draws business opposition, an income tax is
+now constitutionally banned and would need a new amendment (two-thirds of each
+chamber plus a statewide vote), and cutting exemptions creates identifiable losers.
 Students discover why budgets are hard.
 Q2 is the values question and should not be resolved by you.</a:t>
             </a:r>
@@ -1377,9 +1378,11 @@
             <a:r>
               <a:rPr lang="en-US" dirty="0"/>
               <a:t>TIMING: 7 minutes.
-THE HEADLINE: Texas has no personal income tax, and since 2019 a constitutional
-amendment requires a statewide vote to create one. That is not merely a policy
-choice anymore; it is entrenched.
+THE HEADLINE: Texas has no personal income tax. A 1993 amendment required a
+statewide vote to create one, and in 2019 voters (74 percent) went further and
+wrote an outright ban into the constitution. Repealing it would take two-thirds
+of each chamber plus another statewide vote. That is not merely a policy choice
+anymore; it is entrenched.
 THE LOTTERY IS THE BIGGEST MISCONCEPTION in this chapter. Students believe it
 funds public education substantially. It contributes a small share of the
 education budget, roughly in the low single digits as a percentage. Say the number
@@ -4426,7 +4429,7 @@
                 <a:ea typeface="Calibri" pitchFamily="34" charset="-122"/>
                 <a:cs typeface="Calibri" pitchFamily="34" charset="-120"/>
               </a:rPr>
-              <a:t>Chapter 14 in the Trailblazer Trek: 5 sections, 1,245 points. Students submit the Completion Report.</a:t>
+              <a:t>Chapter 14 in the Trailblazer Trek: 5 sections, 1,055 points. Students submit the Completion Report.</a:t>
             </a:r>
             <a:endParaRPr lang="en-US" sz="1200" dirty="0"/>
           </a:p>
@@ -10606,7 +10609,7 @@
                 <a:ea typeface="Calibri" pitchFamily="34" charset="-122"/>
                 <a:cs typeface="Calibri" pitchFamily="34" charset="-120"/>
               </a:rPr>
-              <a:t>Texas voters amended the constitution in 2019 to require a statewide vote before any income tax could be created. Is entrenching a tax policy in the constitution wise, or does it tie the hands of future Texans facing circumstances we cannot foresee?</a:t>
+              <a:t>Texas voters amended the constitution in 2019 to prohibit a state income tax outright. Is entrenching a tax policy in the constitution wise, or does it tie the hands of future Texans facing circumstances we cannot foresee?</a:t>
             </a:r>
             <a:endParaRPr lang="en-US" sz="1600" dirty="0"/>
           </a:p>
